--- a/carpentry/intake-142/PowerPoint/Day-25_2026-12-14_Week-8.pptx
+++ b/carpentry/intake-142/PowerPoint/Day-25_2026-12-14_Week-8.pptx
@@ -889,7 +889,7 @@
           <a:p/>
           <a:p>
             <a:r>
-              <a:t>Open your two revision priorities from last week. Today the number, fraction, conversion and formula stations give you a chance to test those methods again. Keep the formula sheet on page 219 and conversion factors on pages 220–221 available. What should you decide before entering calculator keys? The operation or relationship that fits the question. By the end of this block, you should be able to justify that decision and demonstrate a check on the result.</a:t>
+              <a:t>Open your two revision priorities from last week. Today the number, fraction, conversion and formula stations give you a chance to test those methods again. Keep the formula sheet on page 361 and conversion factors on pages 362–363 available. What should you decide before entering calculator keys? The operation or relationship that fits the question. By the end of this block, you should be able to justify that decision and demonstrate a check on the result.</a:t>
             </a:r>
           </a:p>
         </p:txBody>
@@ -1193,7 +1193,7 @@
           <a:p/>
           <a:p>
             <a:r>
-              <a:t>Figure 8.1 on page 127 represents equality as a balance. If we divide one side of an equation, we divide the other side by the same nonzero quantity to preserve equality. This is the reasoning behind finding width from area and length. Starting with A = l × w, dividing both sides by l leaves A/l = w. Why is this more than a rule to move symbols? We are keeping two equal quantities equal while isolating the unknown. Substitution afterward checks that our proposed value still satisfies the original relationship.</a:t>
+              <a:t>Figure 8.1 on page 195 represents equality as a balance. If we divide one side of an equation, we divide the other side by the same nonzero quantity to preserve equality. This is the reasoning behind finding width from area and length. Starting with A = l × w, dividing both sides by l leaves A/l = w. Why is this more than a rule to move symbols? We are keeping two equal quantities equal while isolating the unknown. Substitution afterward checks that our proposed value still satisfies the original relationship.</a:t>
             </a:r>
           </a:p>
         </p:txBody>
@@ -2363,7 +2363,7 @@
           <a:p/>
           <a:p>
             <a:r>
-              <a:t>For this geometry review, begin with the unknown rather than the formula. Are we measuring an outside boundary, covering a surface, filling space or finding a triangle side? The answer to that question determines the method and unit. We will use selected work from chapters 9–13, the formula sheet on page 219 and the listed exercises. What should you draw before entering numbers? A labelled sketch that separates the given dimensions from the quantity you are trying to find.</a:t>
+              <a:t>For this geometry review, begin with the unknown rather than the formula. Are we measuring an outside boundary, covering a surface, filling space or finding a triangle side? The answer to that question determines the method and unit. We will use selected work from chapters 9–13, the formula sheet on page 361 and the listed exercises. What should you draw before entering numbers? A labelled sketch that separates the given dimensions from the quantity you are trying to find.</a:t>
             </a:r>
           </a:p>
         </p:txBody>
@@ -2667,7 +2667,7 @@
           <a:p/>
           <a:p>
             <a:r>
-              <a:t>Figure 11.1 on page 172 builds volume from unit cubes. A row counts one direction, a layer adds a second, and stacked layers add the third. That is why length times width times height produces cubic units. What does multiplying the base area by height count? The same-sized area repeated through the prism's depth. Keep the three directions conceptually separate even if two dimensions happen to match. A number with square units describes only the base surface, not the space occupied by all the stacked layers.</a:t>
+              <a:t>Figure 11.1 on page 268 builds volume from unit cubes. A row counts one direction, a layer adds a second, and stacked layers add the third. That is why length times width times height produces cubic units. What does multiplying the base area by height count? The same-sized area repeated through the prism's depth. Keep the three directions conceptually separate even if two dimensions happen to match. A number with square units describes only the base surface, not the space occupied by all the stacked layers.</a:t>
             </a:r>
           </a:p>
         </p:txBody>
@@ -3135,7 +3135,7 @@
           <a:p/>
           <a:p>
             <a:r>
-              <a:t>Complete the remaining listed exercises, prioritizing the needs shown in your work. Finish with one Easy Numeracy Hub question in a taught topic and keep its question or code. Before calculating, write why the formula applies. For example, a plate with a hole requires net area, while a box's missing height requires reversing volume divided by base area. The specific explanation makes it easier to see whether a wrong answer came from interpretation, arithmetic, units or calculator entry.</a:t>
+              <a:t>Complete the remaining listed exercises, prioritizing the needs shown in your work. Finish with one Numeracy Hub question in a taught topic, Volume and Layout (Easy level) or Angles and Trig (a Level 1 task) and keep its question or code. Before calculating, write why the formula applies. For example, a plate with a hole requires net area, while a box's missing height requires reversing volume divided by base area. The specific explanation makes it easier to see whether a wrong answer came from interpretation, arithmetic, units or calculator entry.</a:t>
             </a:r>
           </a:p>
         </p:txBody>
@@ -3287,7 +3287,7 @@
           <a:p/>
           <a:p>
             <a:r>
-              <a:t>In Shape Canvas, compare the rectangle, prism and right triangle using the dimensions relevant to your problem. Mark the unknown so the picture tells us what the calculation should return. After the paper work, use one Easy Numeracy Hub task from the matching taught module. Keep the diagram, formula, unit and question code together. If the result seems unreasonable, point to the drawing feature that contradicts it: a leg too long, an area too large or a volume unit where a length was requested.</a:t>
+              <a:t>In Shape Canvas, compare the rectangle, prism and right triangle using the dimensions relevant to your problem. Mark the unknown so the picture tells us what the calculation should return. After the paper work, use one Numeracy Hub task from the matching taught module, Volume and Layout (Easy level) or Angles and Trig (a Level 1 task). Keep the diagram, formula, unit and question code together. If the result seems unreasonable, point to the drawing feature that contradicts it: a leg too long, an area too large or a volume unit where a length was requested.</a:t>
             </a:r>
           </a:p>
         </p:txBody>
@@ -5457,7 +5457,7 @@
                 </a:solidFill>
                 <a:latin typeface="Arial"/>
               </a:rPr>
-              <a:t>Textbook Chapter 1–8, selected; formula sheet p.219; conversion factors pp.220–221</a:t>
+              <a:t>Textbook Chapter 1–8, selected; formula sheet p.361; conversion factors pp.362–363</a:t>
             </a:r>
           </a:p>
         </p:txBody>
@@ -6215,7 +6215,7 @@
                 </a:solidFill>
                 <a:latin typeface="Arial"/>
               </a:rPr>
-              <a:t>Textbook Chapter 1–8, selected; formula sheet p.219; conversion factors pp.220–221</a:t>
+              <a:t>Textbook Chapter 1–8, selected; formula sheet p.361; conversion factors pp.362–363</a:t>
             </a:r>
           </a:p>
         </p:txBody>
@@ -6415,7 +6415,7 @@
                 </a:solidFill>
                 <a:latin typeface="Arial"/>
               </a:rPr>
-              <a:t>Resources: Stations: 1B Q3 p.8; 4A Q14(a),15(a) p.26; 5A Q12–13 p.33; 6A Q19 p.40; 7A Q11–12 p.45; 8C Q1–2 p.55.</a:t>
+              <a:t>Resources: Stations: 1B Q3 p.8; 4A Q14(a),15(a) p.36; 5A Q12–13 p.46; 6A Q19 p.56; 7A Q11–12 p.68; 8C Q1–2 p.81.</a:t>
             </a:r>
           </a:p>
         </p:txBody>
@@ -7029,7 +7029,7 @@
                 </a:solidFill>
                 <a:latin typeface="Arial"/>
               </a:rPr>
-              <a:t>Textbook Chapter 1–8, selected; formula sheet p.219; conversion factors pp.220–221</a:t>
+              <a:t>Textbook Chapter 1–8, selected; formula sheet p.361; conversion factors pp.362–363</a:t>
             </a:r>
           </a:p>
         </p:txBody>
@@ -7229,7 +7229,7 @@
                 </a:solidFill>
                 <a:latin typeface="Arial"/>
               </a:rPr>
-              <a:t>Resources: Stations: 1B Q3 p.8; 4A Q14(a),15(a) p.26; 5A Q12–13 p.33; 6A Q19 p.40; 7A Q11–12 p.45; 8C Q1–2 p.55.</a:t>
+              <a:t>Resources: Stations: 1B Q3 p.8; 4A Q14(a),15(a) p.36; 5A Q12–13 p.46; 6A Q19 p.56; 7A Q11–12 p.68; 8C Q1–2 p.81.</a:t>
             </a:r>
           </a:p>
         </p:txBody>
@@ -7843,7 +7843,7 @@
                 </a:solidFill>
                 <a:latin typeface="Arial"/>
               </a:rPr>
-              <a:t>Textbook Chapter 1–8, selected; formula sheet p.219; conversion factors pp.220–221</a:t>
+              <a:t>Textbook Chapter 1–8, selected; formula sheet p.361; conversion factors pp.362–363</a:t>
             </a:r>
           </a:p>
         </p:txBody>
@@ -8619,7 +8619,7 @@
                 </a:solidFill>
                 <a:latin typeface="Arial"/>
               </a:rPr>
-              <a:t>Textbook Chapter 1–8, selected; formula sheet p.219; conversion factors pp.220–221</a:t>
+              <a:t>Textbook Chapter 1–8, selected; formula sheet p.361; conversion factors pp.362–363</a:t>
             </a:r>
           </a:p>
         </p:txBody>
@@ -9578,7 +9578,7 @@
                 </a:solidFill>
                 <a:latin typeface="Arial"/>
               </a:rPr>
-              <a:t>Textbook Chapter 1–8, selected; formula sheet p.219; conversion factors pp.220–221</a:t>
+              <a:t>Textbook Chapter 1–8, selected; formula sheet p.361; conversion factors pp.362–363</a:t>
             </a:r>
           </a:p>
         </p:txBody>
@@ -10289,7 +10289,7 @@
                 </a:solidFill>
                 <a:latin typeface="Arial"/>
               </a:rPr>
-              <a:t>Textbook Chapter 1–8, selected; formula sheet p.219; conversion factors pp.220–221</a:t>
+              <a:t>Textbook Chapter 1–8, selected; formula sheet p.361; conversion factors pp.362–363</a:t>
             </a:r>
           </a:p>
         </p:txBody>
@@ -10975,7 +10975,7 @@
                 </a:solidFill>
                 <a:latin typeface="Arial"/>
               </a:rPr>
-              <a:t>Textbook Chapter 1–8, selected; formula sheet p.219; conversion factors pp.220–221</a:t>
+              <a:t>Textbook Chapter 1–8, selected; formula sheet p.361; conversion factors pp.362–363</a:t>
             </a:r>
           </a:p>
         </p:txBody>
@@ -11175,7 +11175,7 @@
                 </a:solidFill>
                 <a:latin typeface="Arial"/>
               </a:rPr>
-              <a:t>Resources: Stations: 1B Q3 p.8; 4A Q14(a),15(a) p.26; 5A Q12–13 p.33; 6A Q19 p.40; 7A Q11–12 p.45; 8C Q1–2 p.55.</a:t>
+              <a:t>Resources: Stations: 1B Q3 p.8; 4A Q14(a),15(a) p.36; 5A Q12–13 p.46; 6A Q19 p.56; 7A Q11–12 p.68; 8C Q1–2 p.81.</a:t>
             </a:r>
           </a:p>
         </p:txBody>
@@ -11789,7 +11789,7 @@
                 </a:solidFill>
                 <a:latin typeface="Arial"/>
               </a:rPr>
-              <a:t>Textbook Chapter 1–8, selected; formula sheet p.219; conversion factors pp.220–221</a:t>
+              <a:t>Textbook Chapter 1–8, selected; formula sheet p.361; conversion factors pp.362–363</a:t>
             </a:r>
           </a:p>
         </p:txBody>
@@ -12500,7 +12500,7 @@
                 </a:solidFill>
                 <a:latin typeface="Arial"/>
               </a:rPr>
-              <a:t>Textbook Chapter 1–8, selected; formula sheet p.219; conversion factors pp.220–221</a:t>
+              <a:t>Textbook Chapter 1–8, selected; formula sheet p.361; conversion factors pp.362–363</a:t>
             </a:r>
           </a:p>
         </p:txBody>
@@ -16563,7 +16563,7 @@
                 </a:solidFill>
                 <a:latin typeface="Arial"/>
               </a:rPr>
-              <a:t>Textbook Chapter 1–8, selected; formula sheet p.219; conversion factors pp.220–221</a:t>
+              <a:t>Textbook Chapter 1–8, selected; formula sheet p.361; conversion factors pp.362–363</a:t>
             </a:r>
           </a:p>
         </p:txBody>
@@ -17249,7 +17249,7 @@
                 </a:solidFill>
                 <a:latin typeface="Arial"/>
               </a:rPr>
-              <a:t>Textbook Chapter 1–8, selected; formula sheet p.219; conversion factors pp.220–221</a:t>
+              <a:t>Textbook Chapter 1–8, selected; formula sheet p.361; conversion factors pp.362–363</a:t>
             </a:r>
           </a:p>
         </p:txBody>
@@ -17449,7 +17449,7 @@
                 </a:solidFill>
                 <a:latin typeface="Arial"/>
               </a:rPr>
-              <a:t>Resources: Stations: 1B Q3 p.8; 4A Q14(a),15(a) p.26; 5A Q12–13 p.33; 6A Q19 p.40; 7A Q11–12 p.45; 8C Q1–2 p.55.</a:t>
+              <a:t>Resources: Stations: 1B Q3 p.8; 4A Q14(a),15(a) p.36; 5A Q12–13 p.46; 6A Q19 p.56; 7A Q11–12 p.68; 8C Q1–2 p.81.</a:t>
             </a:r>
           </a:p>
         </p:txBody>
@@ -18728,7 +18728,7 @@
                 </a:solidFill>
                 <a:latin typeface="Arial"/>
               </a:rPr>
-              <a:t>Textbook Chapter 9–13 pp.140–214, selected; formula sheet p.219</a:t>
+              <a:t>Textbook Chapter 9–13 pp.220–339, selected; formula sheet p.361</a:t>
             </a:r>
           </a:p>
         </p:txBody>
@@ -18928,7 +18928,7 @@
                 </a:solidFill>
                 <a:latin typeface="Arial"/>
               </a:rPr>
-              <a:t>Textbook Chapter 9–13 pp.140–214, selected; formula sheet p.219</a:t>
+              <a:t>Textbook Chapter 9–13 pp.220–339, selected; formula sheet p.361</a:t>
             </a:r>
           </a:p>
         </p:txBody>
@@ -18976,7 +18976,7 @@
                 </a:solidFill>
                 <a:latin typeface="Arial"/>
               </a:rPr>
-              <a:t>Exercise Book 9A Q1,8 p.57; 10B Q1,11 pp.65–66; 11A Q7,19 pp.69–70; 12B Q3 p.77; 13A Q6,14 p.82.</a:t>
+              <a:t>Exercise Book 9A Q1,8 p.85; 10B Q1,11 pp.95–96; 11A Q7,19 pp.103–104; 12B Q3 p.116; 13A Q6,14 p.128.</a:t>
             </a:r>
           </a:p>
         </p:txBody>
@@ -19638,7 +19638,7 @@
                 </a:solidFill>
                 <a:latin typeface="Arial"/>
               </a:rPr>
-              <a:t>Textbook Chapter 9–13 pp.140–214, selected; formula sheet p.219</a:t>
+              <a:t>Textbook Chapter 9–13 pp.220–339, selected; formula sheet p.361</a:t>
             </a:r>
           </a:p>
         </p:txBody>
@@ -19838,7 +19838,7 @@
                 </a:solidFill>
                 <a:latin typeface="Arial"/>
               </a:rPr>
-              <a:t>Resources: Exercise Book 9A Q1,8 p.57; 10B Q1,11 pp.65–66; 11A Q7,19 pp.69–70; 12B Q3 p.77; 13A Q6,14 p.82.</a:t>
+              <a:t>Resources: Exercise Book 9A Q1,8 p.85; 10B Q1,11 pp.95–96; 11A Q7,19 pp.103–104; 12B Q3 p.116; 13A Q6,14 p.128.</a:t>
             </a:r>
           </a:p>
         </p:txBody>
@@ -20587,7 +20587,7 @@
                 </a:solidFill>
                 <a:latin typeface="Arial"/>
               </a:rPr>
-              <a:t>Textbook Chapter 9–13 pp.140–214, selected; formula sheet p.219</a:t>
+              <a:t>Textbook Chapter 9–13 pp.220–339, selected; formula sheet p.361</a:t>
             </a:r>
           </a:p>
         </p:txBody>
@@ -21808,7 +21808,7 @@
                 </a:solidFill>
                 <a:latin typeface="Arial"/>
               </a:rPr>
-              <a:t>Textbook Chapter 9–13 pp.140–214, selected; formula sheet p.219</a:t>
+              <a:t>Textbook Chapter 9–13 pp.220–339, selected; formula sheet p.361</a:t>
             </a:r>
           </a:p>
         </p:txBody>
@@ -23831,7 +23831,7 @@
                 <a:ea typeface="Arial" pitchFamily="34" charset="-122"/>
                 <a:cs typeface="Arial" pitchFamily="34" charset="-120"/>
               </a:rPr>
-              <a:t>Exercise Book pp.65,77 • Shape Canvas rectangle, prism and right triangle • Formula sheet p.219</a:t>
+              <a:t>Exercise Book pp.95,116 • Shape Canvas rectangle, prism and right triangle • Formula sheet p.361</a:t>
             </a:r>
             <a:endParaRPr lang="en-US" sz="1050" dirty="0"/>
           </a:p>
@@ -24403,7 +24403,7 @@
                 </a:solidFill>
                 <a:latin typeface="Arial"/>
               </a:rPr>
-              <a:t>Textbook  |  page 172</a:t>
+              <a:t>Textbook  |  page 268</a:t>
             </a:r>
           </a:p>
         </p:txBody>
@@ -24451,7 +24451,7 @@
                 </a:solidFill>
                 <a:latin typeface="Arial"/>
               </a:rPr>
-              <a:t>Textbook Chapter 9–13 pp.140–214, selected; formula sheet p.219</a:t>
+              <a:t>Textbook Chapter 9–13 pp.220–339, selected; formula sheet p.361</a:t>
             </a:r>
           </a:p>
         </p:txBody>
@@ -25089,7 +25089,7 @@
                 </a:solidFill>
                 <a:latin typeface="Arial"/>
               </a:rPr>
-              <a:t>Textbook  |  page 172</a:t>
+              <a:t>Textbook  |  page 268</a:t>
             </a:r>
           </a:p>
         </p:txBody>
@@ -25137,7 +25137,7 @@
                 </a:solidFill>
                 <a:latin typeface="Arial"/>
               </a:rPr>
-              <a:t>Textbook Chapter 9–13 pp.140–214, selected; formula sheet p.219</a:t>
+              <a:t>Textbook Chapter 9–13 pp.220–339, selected; formula sheet p.361</a:t>
             </a:r>
           </a:p>
         </p:txBody>
@@ -25778,7 +25778,7 @@
                 </a:solidFill>
                 <a:latin typeface="Arial"/>
               </a:rPr>
-              <a:t>Textbook Chapter 1–8, selected; formula sheet p.219; conversion factors pp.220–221</a:t>
+              <a:t>Textbook Chapter 1–8, selected; formula sheet p.361; conversion factors pp.362–363</a:t>
             </a:r>
           </a:p>
         </p:txBody>
@@ -25978,7 +25978,7 @@
                 </a:solidFill>
                 <a:latin typeface="Arial"/>
               </a:rPr>
-              <a:t>Textbook Chapter 1–8, selected; formula sheet p.219; conversion factors pp.220–221</a:t>
+              <a:t>Textbook Chapter 1–8, selected; formula sheet p.361; conversion factors pp.362–363</a:t>
             </a:r>
           </a:p>
         </p:txBody>
@@ -26026,7 +26026,7 @@
                 </a:solidFill>
                 <a:latin typeface="Arial"/>
               </a:rPr>
-              <a:t>Stations: 1B Q3 p.8; 4A Q14(a),15(a) p.26; 5A Q12–13 p.33; 6A Q19 p.40; 7A Q11–12 p.45; 8C Q1–2 p.55.</a:t>
+              <a:t>Stations: 1B Q3 p.8; 4A Q14(a),15(a) p.36; 5A Q12–13 p.46; 6A Q19 p.56; 7A Q11–12 p.68; 8C Q1–2 p.81.</a:t>
             </a:r>
           </a:p>
         </p:txBody>
@@ -26688,7 +26688,7 @@
                 </a:solidFill>
                 <a:latin typeface="Arial"/>
               </a:rPr>
-              <a:t>Textbook Chapter 9–13 pp.140–214, selected; formula sheet p.219</a:t>
+              <a:t>Textbook Chapter 9–13 pp.220–339, selected; formula sheet p.361</a:t>
             </a:r>
           </a:p>
         </p:txBody>
@@ -27446,7 +27446,7 @@
                 </a:solidFill>
                 <a:latin typeface="Arial"/>
               </a:rPr>
-              <a:t>Textbook Chapter 9–13 pp.140–214, selected; formula sheet p.219</a:t>
+              <a:t>Textbook Chapter 9–13 pp.220–339, selected; formula sheet p.361</a:t>
             </a:r>
           </a:p>
         </p:txBody>
@@ -27646,7 +27646,7 @@
                 </a:solidFill>
                 <a:latin typeface="Arial"/>
               </a:rPr>
-              <a:t>Resources: Exercise Book 9A Q1,8 p.57; 10B Q1,11 pp.65–66; 11A Q7,19 pp.69–70; 12B Q3 p.77; 13A Q6,14 p.82.</a:t>
+              <a:t>Resources: Exercise Book 9A Q1,8 p.85; 10B Q1,11 pp.95–96; 11A Q7,19 pp.103–104; 12B Q3 p.116; 13A Q6,14 p.128.</a:t>
             </a:r>
           </a:p>
         </p:txBody>
@@ -28260,7 +28260,7 @@
                 </a:solidFill>
                 <a:latin typeface="Arial"/>
               </a:rPr>
-              <a:t>Textbook Chapter 9–13 pp.140–214, selected; formula sheet p.219</a:t>
+              <a:t>Textbook Chapter 9–13 pp.220–339, selected; formula sheet p.361</a:t>
             </a:r>
           </a:p>
         </p:txBody>
@@ -29016,7 +29016,7 @@
                 </a:solidFill>
                 <a:latin typeface="Arial"/>
               </a:rPr>
-              <a:t>Textbook Chapter 9–13 pp.140–214, selected; formula sheet p.219</a:t>
+              <a:t>Textbook Chapter 9–13 pp.220–339, selected; formula sheet p.361</a:t>
             </a:r>
           </a:p>
         </p:txBody>
@@ -29798,7 +29798,7 @@
                 </a:solidFill>
                 <a:latin typeface="Arial"/>
               </a:rPr>
-              <a:t>Textbook Chapter 9–13 pp.140–214, selected; formula sheet p.219</a:t>
+              <a:t>Textbook Chapter 9–13 pp.220–339, selected; formula sheet p.361</a:t>
             </a:r>
           </a:p>
         </p:txBody>
@@ -29998,7 +29998,7 @@
                 </a:solidFill>
                 <a:latin typeface="Arial"/>
               </a:rPr>
-              <a:t>Resources: Exercise Book 9A Q1,8 p.57; 10B Q1,11 pp.65–66; 11A Q7,19 pp.69–70; 12B Q3 p.77; 13A Q6,14 p.82.</a:t>
+              <a:t>Resources: Exercise Book 9A Q1,8 p.85; 10B Q1,11 pp.95–96; 11A Q7,19 pp.103–104; 12B Q3 p.116; 13A Q6,14 p.128.</a:t>
             </a:r>
           </a:p>
         </p:txBody>
@@ -30612,7 +30612,7 @@
                 </a:solidFill>
                 <a:latin typeface="Arial"/>
               </a:rPr>
-              <a:t>Textbook Chapter 9–13 pp.140–214, selected; formula sheet p.219</a:t>
+              <a:t>Textbook Chapter 9–13 pp.220–339, selected; formula sheet p.361</a:t>
             </a:r>
           </a:p>
         </p:txBody>
@@ -31388,7 +31388,7 @@
                 </a:solidFill>
                 <a:latin typeface="Arial"/>
               </a:rPr>
-              <a:t>Textbook Chapter 9–13 pp.140–214, selected; formula sheet p.219</a:t>
+              <a:t>Textbook Chapter 9–13 pp.220–339, selected; formula sheet p.361</a:t>
             </a:r>
           </a:p>
         </p:txBody>
@@ -31618,7 +31618,7 @@
                 </a:solidFill>
                 <a:latin typeface="Arial"/>
               </a:rPr>
-              <a:t>After the listed paper work, use Numeracy Hub Volume and Layout or Angles and Trig for one Easy task in a taught topic, chosen to match the documented need.</a:t>
+              <a:t>After the listed paper work, use Numeracy Hub Volume and Layout (Easy level) or Angles and Trig (a Level 1 task) for one task in a taught topic, chosen to match the documented need.</a:t>
             </a:r>
           </a:p>
         </p:txBody>
@@ -32347,7 +32347,7 @@
                 </a:solidFill>
                 <a:latin typeface="Arial"/>
               </a:rPr>
-              <a:t>Textbook Chapter 9–13 pp.140–214, selected; formula sheet p.219</a:t>
+              <a:t>Textbook Chapter 9–13 pp.220–339, selected; formula sheet p.361</a:t>
             </a:r>
           </a:p>
         </p:txBody>
@@ -33058,7 +33058,7 @@
                 </a:solidFill>
                 <a:latin typeface="Arial"/>
               </a:rPr>
-              <a:t>Textbook Chapter 9–13 pp.140–214, selected; formula sheet p.219</a:t>
+              <a:t>Textbook Chapter 9–13 pp.220–339, selected; formula sheet p.361</a:t>
             </a:r>
           </a:p>
         </p:txBody>
@@ -33769,7 +33769,7 @@
                 </a:solidFill>
                 <a:latin typeface="Arial"/>
               </a:rPr>
-              <a:t>Textbook Chapter 9–13 pp.140–214, selected; formula sheet p.219</a:t>
+              <a:t>Textbook Chapter 9–13 pp.220–339, selected; formula sheet p.361</a:t>
             </a:r>
           </a:p>
         </p:txBody>
@@ -33969,7 +33969,7 @@
                 </a:solidFill>
                 <a:latin typeface="Arial"/>
               </a:rPr>
-              <a:t>Resources: Exercise Book 9A Q1,8 p.57; 10B Q1,11 pp.65–66; 11A Q7,19 pp.69–70; 12B Q3 p.77; 13A Q6,14 p.82.</a:t>
+              <a:t>Resources: Exercise Book 9A Q1,8 p.85; 10B Q1,11 pp.95–96; 11A Q7,19 pp.103–104; 12B Q3 p.116; 13A Q6,14 p.128.</a:t>
             </a:r>
           </a:p>
         </p:txBody>
@@ -34583,7 +34583,7 @@
                 </a:solidFill>
                 <a:latin typeface="Arial"/>
               </a:rPr>
-              <a:t>Textbook Chapter 1–8, selected; formula sheet p.219; conversion factors pp.220–221</a:t>
+              <a:t>Textbook Chapter 1–8, selected; formula sheet p.361; conversion factors pp.362–363</a:t>
             </a:r>
           </a:p>
         </p:txBody>
@@ -34783,7 +34783,7 @@
                 </a:solidFill>
                 <a:latin typeface="Arial"/>
               </a:rPr>
-              <a:t>Resources: Stations: 1B Q3 p.8; 4A Q14(a),15(a) p.26; 5A Q12–13 p.33; 6A Q19 p.40; 7A Q11–12 p.45; 8C Q1–2 p.55.</a:t>
+              <a:t>Resources: Stations: 1B Q3 p.8; 4A Q14(a),15(a) p.36; 5A Q12–13 p.46; 6A Q19 p.56; 7A Q11–12 p.68; 8C Q1–2 p.81.</a:t>
             </a:r>
           </a:p>
         </p:txBody>
@@ -35397,7 +35397,7 @@
                 </a:solidFill>
                 <a:latin typeface="Arial"/>
               </a:rPr>
-              <a:t>Textbook Chapter 9–13 pp.140–214, selected; formula sheet p.219</a:t>
+              <a:t>Textbook Chapter 9–13 pp.220–339, selected; formula sheet p.361</a:t>
             </a:r>
           </a:p>
         </p:txBody>
@@ -36108,7 +36108,7 @@
                 </a:solidFill>
                 <a:latin typeface="Arial"/>
               </a:rPr>
-              <a:t>Textbook Chapter 9–13 pp.140–214, selected; formula sheet p.219</a:t>
+              <a:t>Textbook Chapter 9–13 pp.220–339, selected; formula sheet p.361</a:t>
             </a:r>
           </a:p>
         </p:txBody>
@@ -36819,7 +36819,7 @@
                 </a:solidFill>
                 <a:latin typeface="Arial"/>
               </a:rPr>
-              <a:t>Textbook Chapter 9–13 pp.140–214, selected; formula sheet p.219</a:t>
+              <a:t>Textbook Chapter 9–13 pp.220–339, selected; formula sheet p.361</a:t>
             </a:r>
           </a:p>
         </p:txBody>
@@ -37530,7 +37530,7 @@
                 </a:solidFill>
                 <a:latin typeface="Arial"/>
               </a:rPr>
-              <a:t>Textbook Chapter 9–13 pp.140–214, selected; formula sheet p.219</a:t>
+              <a:t>Textbook Chapter 9–13 pp.220–339, selected; formula sheet p.361</a:t>
             </a:r>
           </a:p>
         </p:txBody>
@@ -37730,7 +37730,7 @@
                 </a:solidFill>
                 <a:latin typeface="Arial"/>
               </a:rPr>
-              <a:t>Resources: Exercise Book 9A Q1,8 p.57; 10B Q1,11 pp.65–66; 11A Q7,19 pp.69–70; 12B Q3 p.77; 13A Q6,14 p.82.</a:t>
+              <a:t>Resources: Exercise Book 9A Q1,8 p.85; 10B Q1,11 pp.95–96; 11A Q7,19 pp.103–104; 12B Q3 p.116; 13A Q6,14 p.128.</a:t>
             </a:r>
           </a:p>
         </p:txBody>
@@ -38479,7 +38479,7 @@
                 </a:solidFill>
                 <a:latin typeface="Arial"/>
               </a:rPr>
-              <a:t>Textbook Chapter 1–8, selected; formula sheet p.219; conversion factors pp.220–221</a:t>
+              <a:t>Textbook Chapter 1–8, selected; formula sheet p.361; conversion factors pp.362–363</a:t>
             </a:r>
           </a:p>
         </p:txBody>
@@ -39700,7 +39700,7 @@
                 </a:solidFill>
                 <a:latin typeface="Arial"/>
               </a:rPr>
-              <a:t>Textbook Chapter 1–8, selected; formula sheet p.219; conversion factors pp.220–221</a:t>
+              <a:t>Textbook Chapter 1–8, selected; formula sheet p.361; conversion factors pp.362–363</a:t>
             </a:r>
           </a:p>
         </p:txBody>
@@ -40054,7 +40054,7 @@
                 </a:solidFill>
                 <a:latin typeface="Arial"/>
               </a:rPr>
-              <a:t>Use the selected Textbook chapters, formula sheet p.219 and conversion factors pp.220–221 to explain why the method applies.</a:t>
+              <a:t>Use the selected Textbook chapters, formula sheet p.361 and conversion factors pp.362–363 to explain why the method applies.</a:t>
             </a:r>
           </a:p>
         </p:txBody>
@@ -40850,7 +40850,7 @@
                 <a:ea typeface="Arial" pitchFamily="34" charset="-122"/>
                 <a:cs typeface="Arial" pitchFamily="34" charset="-120"/>
               </a:rPr>
-              <a:t>4A Q14(a),15(a) p.26;</a:t>
+              <a:t>4A Q14(a),15(a) p.36;</a:t>
             </a:r>
             <a:endParaRPr lang="en-US" sz="1800" dirty="0"/>
           </a:p>
@@ -40867,7 +40867,7 @@
                 <a:ea typeface="Arial" pitchFamily="34" charset="-122"/>
                 <a:cs typeface="Arial" pitchFamily="34" charset="-120"/>
               </a:rPr>
-              <a:t>5A Q12–13 p.33.</a:t>
+              <a:t>5A Q12–13 p.46.</a:t>
             </a:r>
             <a:endParaRPr lang="en-US" sz="1800" dirty="0"/>
           </a:p>
@@ -40942,7 +40942,7 @@
                 <a:ea typeface="Arial" pitchFamily="34" charset="-122"/>
                 <a:cs typeface="Arial" pitchFamily="34" charset="-120"/>
               </a:rPr>
-              <a:t>6A Q19 p.40;</a:t>
+              <a:t>6A Q19 p.56;</a:t>
             </a:r>
             <a:endParaRPr lang="en-US" sz="1800" dirty="0"/>
           </a:p>
@@ -40959,7 +40959,7 @@
                 <a:ea typeface="Arial" pitchFamily="34" charset="-122"/>
                 <a:cs typeface="Arial" pitchFamily="34" charset="-120"/>
               </a:rPr>
-              <a:t>7A Q11–12 p.45.</a:t>
+              <a:t>7A Q11–12 p.68.</a:t>
             </a:r>
             <a:endParaRPr lang="en-US" sz="1800" dirty="0"/>
           </a:p>
@@ -41034,7 +41034,7 @@
                 <a:ea typeface="Arial" pitchFamily="34" charset="-122"/>
                 <a:cs typeface="Arial" pitchFamily="34" charset="-120"/>
               </a:rPr>
-              <a:t>8C Q1–2 p.55.</a:t>
+              <a:t>8C Q1–2 p.81.</a:t>
             </a:r>
             <a:endParaRPr lang="en-US" sz="1800" dirty="0"/>
           </a:p>
@@ -41746,7 +41746,7 @@
                 </a:solidFill>
                 <a:latin typeface="Arial"/>
               </a:rPr>
-              <a:t>Textbook  |  page 127</a:t>
+              <a:t>Textbook  |  page 195</a:t>
             </a:r>
           </a:p>
         </p:txBody>
@@ -41794,7 +41794,7 @@
                 </a:solidFill>
                 <a:latin typeface="Arial"/>
               </a:rPr>
-              <a:t>Textbook Chapter 1–8, selected; formula sheet p.219; conversion factors pp.220–221</a:t>
+              <a:t>Textbook Chapter 1–8, selected; formula sheet p.361; conversion factors pp.362–363</a:t>
             </a:r>
           </a:p>
         </p:txBody>
@@ -42432,7 +42432,7 @@
                 </a:solidFill>
                 <a:latin typeface="Arial"/>
               </a:rPr>
-              <a:t>Textbook  |  page 127</a:t>
+              <a:t>Textbook  |  page 196</a:t>
             </a:r>
           </a:p>
         </p:txBody>
@@ -42480,7 +42480,7 @@
                 </a:solidFill>
                 <a:latin typeface="Arial"/>
               </a:rPr>
-              <a:t>Textbook Chapter 1–8, selected; formula sheet p.219; conversion factors pp.220–221</a:t>
+              <a:t>Textbook Chapter 1–8, selected; formula sheet p.361; conversion factors pp.362–363</a:t>
             </a:r>
           </a:p>
         </p:txBody>

--- a/carpentry/intake-142/PowerPoint/Day-25_2026-12-14_Week-8.pptx
+++ b/carpentry/intake-142/PowerPoint/Day-25_2026-12-14_Week-8.pptx
@@ -17718,6 +17718,104 @@
                 <a:latin typeface="Arial"/>
               </a:rPr>
               <a:t>Day 25  •  2026-12-14  •  21</a:t>
+            </a:r>
+          </a:p>
+        </p:txBody>
+      </p:sp>
+      <p:sp>
+        <p:nvSpPr>
+          <p:cNvPr id="22" name="Play quiz W08-L01"/>
+          <p:cNvSpPr txBox="1"/>
+          <p:nvPr/>
+        </p:nvSpPr>
+        <p:spPr>
+          <a:xfrm>
+            <a:off x="6355080" y="6606540"/>
+            <a:ext cx="822960" cy="210312"/>
+          </a:xfrm>
+          <a:prstGeom prst="rect">
+            <a:avLst/>
+          </a:prstGeom>
+          <a:noFill/>
+        </p:spPr>
+        <p:txBody>
+          <a:bodyPr wrap="square" lIns="0" rIns="0" tIns="0" bIns="0" anchor="t">
+            <a:normAutofit fontScale="100000" lnSpcReduction="0"/>
+          </a:bodyPr>
+          <a:lstStyle/>
+          <a:p>
+            <a:pPr>
+              <a:spcBef>
+                <a:spcPts val="0"/>
+              </a:spcBef>
+              <a:spcAft>
+                <a:spcPts val="0"/>
+              </a:spcAft>
+              <a:defRPr sz="1000" b="0">
+                <a:solidFill>
+                  <a:srgbClr val="D0002B"/>
+                </a:solidFill>
+                <a:latin typeface="Arial"/>
+              </a:defRPr>
+            </a:pPr>
+            <a:r>
+              <a:rPr sz="1000">
+                <a:solidFill>
+                  <a:srgbClr val="F7F8FC"/>
+                </a:solidFill>
+                <a:latin typeface="Arial"/>
+                <a:hlinkClick r:id="rId8"/>
+              </a:rPr>
+              <a:t>Play quiz</a:t>
+            </a:r>
+          </a:p>
+        </p:txBody>
+      </p:sp>
+      <p:sp>
+        <p:nvSpPr>
+          <p:cNvPr id="23" name="Quiz PDF W08-L01"/>
+          <p:cNvSpPr txBox="1"/>
+          <p:nvPr/>
+        </p:nvSpPr>
+        <p:spPr>
+          <a:xfrm>
+            <a:off x="7296912" y="6606540"/>
+            <a:ext cx="1005840" cy="210312"/>
+          </a:xfrm>
+          <a:prstGeom prst="rect">
+            <a:avLst/>
+          </a:prstGeom>
+          <a:noFill/>
+        </p:spPr>
+        <p:txBody>
+          <a:bodyPr wrap="square" lIns="0" rIns="0" tIns="0" bIns="0" anchor="t">
+            <a:normAutofit fontScale="100000" lnSpcReduction="0"/>
+          </a:bodyPr>
+          <a:lstStyle/>
+          <a:p>
+            <a:pPr>
+              <a:spcBef>
+                <a:spcPts val="0"/>
+              </a:spcBef>
+              <a:spcAft>
+                <a:spcPts val="0"/>
+              </a:spcAft>
+              <a:defRPr sz="1000" b="0">
+                <a:solidFill>
+                  <a:srgbClr val="D0002B"/>
+                </a:solidFill>
+                <a:latin typeface="Arial"/>
+              </a:defRPr>
+            </a:pPr>
+            <a:r>
+              <a:rPr sz="1000">
+                <a:solidFill>
+                  <a:srgbClr val="F7F8FC"/>
+                </a:solidFill>
+                <a:latin typeface="Arial"/>
+                <a:hlinkClick r:id="rId9"/>
+              </a:rPr>
+              <a:t>Quiz PDF</a:t>
             </a:r>
           </a:p>
         </p:txBody>
@@ -38003,6 +38101,104 @@
           </a:p>
         </p:txBody>
       </p:sp>
+      <p:sp>
+        <p:nvSpPr>
+          <p:cNvPr id="22" name="Play quiz W08-L02"/>
+          <p:cNvSpPr txBox="1"/>
+          <p:nvPr/>
+        </p:nvSpPr>
+        <p:spPr>
+          <a:xfrm>
+            <a:off x="6355080" y="6606540"/>
+            <a:ext cx="822960" cy="210312"/>
+          </a:xfrm>
+          <a:prstGeom prst="rect">
+            <a:avLst/>
+          </a:prstGeom>
+          <a:noFill/>
+        </p:spPr>
+        <p:txBody>
+          <a:bodyPr wrap="square" lIns="0" rIns="0" tIns="0" bIns="0" anchor="t">
+            <a:normAutofit fontScale="100000" lnSpcReduction="0"/>
+          </a:bodyPr>
+          <a:lstStyle/>
+          <a:p>
+            <a:pPr>
+              <a:spcBef>
+                <a:spcPts val="0"/>
+              </a:spcBef>
+              <a:spcAft>
+                <a:spcPts val="0"/>
+              </a:spcAft>
+              <a:defRPr sz="1000" b="0">
+                <a:solidFill>
+                  <a:srgbClr val="D0002B"/>
+                </a:solidFill>
+                <a:latin typeface="Arial"/>
+              </a:defRPr>
+            </a:pPr>
+            <a:r>
+              <a:rPr sz="1000">
+                <a:solidFill>
+                  <a:srgbClr val="F7F8FC"/>
+                </a:solidFill>
+                <a:latin typeface="Arial"/>
+                <a:hlinkClick r:id="rId8"/>
+              </a:rPr>
+              <a:t>Play quiz</a:t>
+            </a:r>
+          </a:p>
+        </p:txBody>
+      </p:sp>
+      <p:sp>
+        <p:nvSpPr>
+          <p:cNvPr id="23" name="Quiz PDF W08-L02"/>
+          <p:cNvSpPr txBox="1"/>
+          <p:nvPr/>
+        </p:nvSpPr>
+        <p:spPr>
+          <a:xfrm>
+            <a:off x="7296912" y="6606540"/>
+            <a:ext cx="1005840" cy="210312"/>
+          </a:xfrm>
+          <a:prstGeom prst="rect">
+            <a:avLst/>
+          </a:prstGeom>
+          <a:noFill/>
+        </p:spPr>
+        <p:txBody>
+          <a:bodyPr wrap="square" lIns="0" rIns="0" tIns="0" bIns="0" anchor="t">
+            <a:normAutofit fontScale="100000" lnSpcReduction="0"/>
+          </a:bodyPr>
+          <a:lstStyle/>
+          <a:p>
+            <a:pPr>
+              <a:spcBef>
+                <a:spcPts val="0"/>
+              </a:spcBef>
+              <a:spcAft>
+                <a:spcPts val="0"/>
+              </a:spcAft>
+              <a:defRPr sz="1000" b="0">
+                <a:solidFill>
+                  <a:srgbClr val="D0002B"/>
+                </a:solidFill>
+                <a:latin typeface="Arial"/>
+              </a:defRPr>
+            </a:pPr>
+            <a:r>
+              <a:rPr sz="1000">
+                <a:solidFill>
+                  <a:srgbClr val="F7F8FC"/>
+                </a:solidFill>
+                <a:latin typeface="Arial"/>
+                <a:hlinkClick r:id="rId9"/>
+              </a:rPr>
+              <a:t>Quiz PDF</a:t>
+            </a:r>
+          </a:p>
+        </p:txBody>
+      </p:sp>
     </p:spTree>
   </p:cSld>
   <p:clrMapOvr>
